--- a/STP/presentations/Environmental and Social risks.pptx
+++ b/STP/presentations/Environmental and Social risks.pptx
@@ -671,7 +671,7 @@
           <a:p>
             <a:fld id="{779B1DDD-8229-2C4E-8910-A0E8F8BF9E17}" type="datetimeFigureOut">
               <a:rPr lang="en-IT" smtClean="0"/>
-              <a:t>27/11/25</a:t>
+              <a:t>28/11/25</a:t>
             </a:fld>
             <a:endParaRPr lang="en-IT"/>
           </a:p>
@@ -1088,7 +1088,7 @@
           <a:p>
             <a:fld id="{F8A8B291-23C9-4CE5-96D0-E0118EB6230C}" type="datetimeFigureOut">
               <a:rPr lang="en-GB" smtClean="0"/>
-              <a:t>27/11/2025</a:t>
+              <a:t>28/11/2025</a:t>
             </a:fld>
             <a:endParaRPr lang="en-GB"/>
           </a:p>
@@ -1288,7 +1288,7 @@
           <a:p>
             <a:fld id="{F8A8B291-23C9-4CE5-96D0-E0118EB6230C}" type="datetimeFigureOut">
               <a:rPr lang="en-GB" smtClean="0"/>
-              <a:t>27/11/2025</a:t>
+              <a:t>28/11/2025</a:t>
             </a:fld>
             <a:endParaRPr lang="en-GB"/>
           </a:p>
@@ -1498,7 +1498,7 @@
           <a:p>
             <a:fld id="{F8A8B291-23C9-4CE5-96D0-E0118EB6230C}" type="datetimeFigureOut">
               <a:rPr lang="en-GB" smtClean="0"/>
-              <a:t>27/11/2025</a:t>
+              <a:t>28/11/2025</a:t>
             </a:fld>
             <a:endParaRPr lang="en-GB"/>
           </a:p>
@@ -1698,7 +1698,7 @@
           <a:p>
             <a:fld id="{F8A8B291-23C9-4CE5-96D0-E0118EB6230C}" type="datetimeFigureOut">
               <a:rPr lang="en-GB" smtClean="0"/>
-              <a:t>27/11/2025</a:t>
+              <a:t>28/11/2025</a:t>
             </a:fld>
             <a:endParaRPr lang="en-GB"/>
           </a:p>
@@ -1974,7 +1974,7 @@
           <a:p>
             <a:fld id="{F8A8B291-23C9-4CE5-96D0-E0118EB6230C}" type="datetimeFigureOut">
               <a:rPr lang="en-GB" smtClean="0"/>
-              <a:t>27/11/2025</a:t>
+              <a:t>28/11/2025</a:t>
             </a:fld>
             <a:endParaRPr lang="en-GB"/>
           </a:p>
@@ -2242,7 +2242,7 @@
           <a:p>
             <a:fld id="{F8A8B291-23C9-4CE5-96D0-E0118EB6230C}" type="datetimeFigureOut">
               <a:rPr lang="en-GB" smtClean="0"/>
-              <a:t>27/11/2025</a:t>
+              <a:t>28/11/2025</a:t>
             </a:fld>
             <a:endParaRPr lang="en-GB"/>
           </a:p>
@@ -2657,7 +2657,7 @@
           <a:p>
             <a:fld id="{F8A8B291-23C9-4CE5-96D0-E0118EB6230C}" type="datetimeFigureOut">
               <a:rPr lang="en-GB" smtClean="0"/>
-              <a:t>27/11/2025</a:t>
+              <a:t>28/11/2025</a:t>
             </a:fld>
             <a:endParaRPr lang="en-GB"/>
           </a:p>
@@ -2799,7 +2799,7 @@
           <a:p>
             <a:fld id="{F8A8B291-23C9-4CE5-96D0-E0118EB6230C}" type="datetimeFigureOut">
               <a:rPr lang="en-GB" smtClean="0"/>
-              <a:t>27/11/2025</a:t>
+              <a:t>28/11/2025</a:t>
             </a:fld>
             <a:endParaRPr lang="en-GB"/>
           </a:p>
@@ -2912,7 +2912,7 @@
           <a:p>
             <a:fld id="{F8A8B291-23C9-4CE5-96D0-E0118EB6230C}" type="datetimeFigureOut">
               <a:rPr lang="en-GB" smtClean="0"/>
-              <a:t>27/11/2025</a:t>
+              <a:t>28/11/2025</a:t>
             </a:fld>
             <a:endParaRPr lang="en-GB"/>
           </a:p>
@@ -3225,7 +3225,7 @@
           <a:p>
             <a:fld id="{F8A8B291-23C9-4CE5-96D0-E0118EB6230C}" type="datetimeFigureOut">
               <a:rPr lang="en-GB" smtClean="0"/>
-              <a:t>27/11/2025</a:t>
+              <a:t>28/11/2025</a:t>
             </a:fld>
             <a:endParaRPr lang="en-GB"/>
           </a:p>
@@ -3514,7 +3514,7 @@
           <a:p>
             <a:fld id="{F8A8B291-23C9-4CE5-96D0-E0118EB6230C}" type="datetimeFigureOut">
               <a:rPr lang="en-GB" smtClean="0"/>
-              <a:t>27/11/2025</a:t>
+              <a:t>28/11/2025</a:t>
             </a:fld>
             <a:endParaRPr lang="en-GB"/>
           </a:p>
@@ -3757,7 +3757,7 @@
           <a:p>
             <a:fld id="{F8A8B291-23C9-4CE5-96D0-E0118EB6230C}" type="datetimeFigureOut">
               <a:rPr lang="en-GB" smtClean="0"/>
-              <a:t>27/11/2025</a:t>
+              <a:t>28/11/2025</a:t>
             </a:fld>
             <a:endParaRPr lang="en-GB"/>
           </a:p>
@@ -8425,8 +8425,8 @@
         </p:nvSpPr>
         <p:spPr>
           <a:xfrm>
-            <a:off x="6384471" y="3626097"/>
-            <a:ext cx="3566682" cy="923330"/>
+            <a:off x="6529609" y="3626097"/>
+            <a:ext cx="3276410" cy="923330"/>
           </a:xfrm>
           <a:prstGeom prst="rect">
             <a:avLst/>
@@ -8450,15 +8450,22 @@
           <a:p>
             <a:pPr algn="ctr"/>
             <a:r>
-              <a:rPr lang="en-GB" sz="5400" b="1" cap="none" spc="0" dirty="0">
+              <a:rPr lang="en-GB" sz="5400" b="1" cap="none" spc="0">
                 <a:ln/>
                 <a:solidFill>
                   <a:schemeClr val="accent4"/>
                 </a:solidFill>
                 <a:effectLst/>
               </a:rPr>
-              <a:t>Thank you!</a:t>
-            </a:r>
+              <a:t>Obrigado!</a:t>
+            </a:r>
+            <a:endParaRPr lang="en-GB" sz="5400" b="1" cap="none" spc="0" dirty="0">
+              <a:ln/>
+              <a:solidFill>
+                <a:schemeClr val="accent4"/>
+              </a:solidFill>
+              <a:effectLst/>
+            </a:endParaRPr>
           </a:p>
         </p:txBody>
       </p:sp>
@@ -9106,6 +9113,15 @@
 </file>
 
 <file path=customXml/item1.xml><?xml version="1.0" encoding="utf-8"?>
+<?mso-contentType ?>
+<FormTemplates xmlns="http://schemas.microsoft.com/sharepoint/v3/contenttype/forms">
+  <Display>DocumentLibraryForm</Display>
+  <Edit>DocumentLibraryForm</Edit>
+  <New>DocumentLibraryForm</New>
+</FormTemplates>
+</file>
+
+<file path=customXml/item2.xml><?xml version="1.0" encoding="utf-8"?>
 <ct:contentTypeSchema xmlns:ct="http://schemas.microsoft.com/office/2006/metadata/contentType" xmlns:ma="http://schemas.microsoft.com/office/2006/metadata/properties/metaAttributes" ct:_="" ma:_="" ma:contentTypeName="Document" ma:contentTypeID="0x01010072500CC7CC11694381E56D15BD009ABF" ma:contentTypeVersion="17" ma:contentTypeDescription="Create a new document." ma:contentTypeScope="" ma:versionID="5bde0183fae20f930619151b743545d5">
   <xsd:schema xmlns:xsd="http://www.w3.org/2001/XMLSchema" xmlns:xs="http://www.w3.org/2001/XMLSchema" xmlns:p="http://schemas.microsoft.com/office/2006/metadata/properties" xmlns:ns2="c0caafef-fd22-48d0-85dc-526f5aa604f6" xmlns:ns3="cc7ce8ca-8f52-44ec-9496-3c41d0f5ad18" targetNamespace="http://schemas.microsoft.com/office/2006/metadata/properties" ma:root="true" ma:fieldsID="b93acc077f3eeba91a697f445d89f976" ns2:_="" ns3:_="">
     <xsd:import namespace="c0caafef-fd22-48d0-85dc-526f5aa604f6"/>
@@ -9354,15 +9370,6 @@
 </ct:contentTypeSchema>
 </file>
 
-<file path=customXml/item2.xml><?xml version="1.0" encoding="utf-8"?>
-<?mso-contentType ?>
-<FormTemplates xmlns="http://schemas.microsoft.com/sharepoint/v3/contenttype/forms">
-  <Display>DocumentLibraryForm</Display>
-  <Edit>DocumentLibraryForm</Edit>
-  <New>DocumentLibraryForm</New>
-</FormTemplates>
-</file>
-
 <file path=customXml/item3.xml><?xml version="1.0" encoding="utf-8"?>
 <p:properties xmlns:p="http://schemas.microsoft.com/office/2006/metadata/properties" xmlns:xsi="http://www.w3.org/2001/XMLSchema-instance" xmlns:pc="http://schemas.microsoft.com/office/infopath/2007/PartnerControls">
   <documentManagement>
@@ -9375,6 +9382,14 @@
 </file>
 
 <file path=customXml/itemProps1.xml><?xml version="1.0" encoding="utf-8"?>
+<ds:datastoreItem xmlns:ds="http://schemas.openxmlformats.org/officeDocument/2006/customXml" ds:itemID="{3A3DF9AB-00FC-46DB-A5D6-293E8DE99346}">
+  <ds:schemaRefs>
+    <ds:schemaRef ds:uri="http://schemas.microsoft.com/sharepoint/v3/contenttype/forms"/>
+  </ds:schemaRefs>
+</ds:datastoreItem>
+</file>
+
+<file path=customXml/itemProps2.xml><?xml version="1.0" encoding="utf-8"?>
 <ds:datastoreItem xmlns:ds="http://schemas.openxmlformats.org/officeDocument/2006/customXml" ds:itemID="{F8E82391-0565-41E9-9127-B1DFEFCF6557}">
   <ds:schemaRefs>
     <ds:schemaRef ds:uri="http://schemas.microsoft.com/office/2006/metadata/contentType"/>
@@ -9393,14 +9408,6 @@
 </ds:datastoreItem>
 </file>
 
-<file path=customXml/itemProps2.xml><?xml version="1.0" encoding="utf-8"?>
-<ds:datastoreItem xmlns:ds="http://schemas.openxmlformats.org/officeDocument/2006/customXml" ds:itemID="{3A3DF9AB-00FC-46DB-A5D6-293E8DE99346}">
-  <ds:schemaRefs>
-    <ds:schemaRef ds:uri="http://schemas.microsoft.com/sharepoint/v3/contenttype/forms"/>
-  </ds:schemaRefs>
-</ds:datastoreItem>
-</file>
-
 <file path=customXml/itemProps3.xml><?xml version="1.0" encoding="utf-8"?>
 <ds:datastoreItem xmlns:ds="http://schemas.openxmlformats.org/officeDocument/2006/customXml" ds:itemID="{E17CF73B-06D3-4F9B-955D-0740B08863BD}">
   <ds:schemaRefs>
